--- a/sem_11_net2/presentations/caos_11.pptx
+++ b/sem_11_net2/presentations/caos_11.pptx
@@ -288,7 +288,7 @@
           <a:p>
             <a:fld id="{1D8BD707-D9CF-40AE-B4C6-C98DA3205C09}" type="datetimeFigureOut">
               <a:rPr lang="en-US"/>
-              <a:t>11/28/2024</a:t>
+              <a:t>12/5/2024</a:t>
             </a:fld>
             <a:endParaRPr lang="en-US"/>
           </a:p>
@@ -465,7 +465,7 @@
           <a:p>
             <a:fld id="{1D8BD707-D9CF-40AE-B4C6-C98DA3205C09}" type="datetimeFigureOut">
               <a:rPr lang="en-US"/>
-              <a:t>11/28/2024</a:t>
+              <a:t>12/5/2024</a:t>
             </a:fld>
             <a:endParaRPr lang="en-US"/>
           </a:p>
@@ -679,7 +679,7 @@
           <a:p>
             <a:fld id="{1D8BD707-D9CF-40AE-B4C6-C98DA3205C09}" type="datetimeFigureOut">
               <a:rPr lang="en-US"/>
-              <a:t>11/28/2024</a:t>
+              <a:t>12/5/2024</a:t>
             </a:fld>
             <a:endParaRPr lang="en-US"/>
           </a:p>
@@ -857,7 +857,7 @@
           <a:p>
             <a:fld id="{1D8BD707-D9CF-40AE-B4C6-C98DA3205C09}" type="datetimeFigureOut">
               <a:rPr lang="en-US"/>
-              <a:t>11/28/2024</a:t>
+              <a:t>12/5/2024</a:t>
             </a:fld>
             <a:endParaRPr lang="en-US"/>
           </a:p>
@@ -976,7 +976,7 @@
           <a:p>
             <a:fld id="{1D8BD707-D9CF-40AE-B4C6-C98DA3205C09}" type="datetimeFigureOut">
               <a:rPr lang="en-US"/>
-              <a:t>11/28/2024</a:t>
+              <a:t>12/5/2024</a:t>
             </a:fld>
             <a:endParaRPr lang="en-US"/>
           </a:p>
@@ -1201,7 +1201,7 @@
           <a:p>
             <a:fld id="{1D8BD707-D9CF-40AE-B4C6-C98DA3205C09}" type="datetimeFigureOut">
               <a:rPr lang="en-US"/>
-              <a:t>11/28/2024</a:t>
+              <a:t>12/5/2024</a:t>
             </a:fld>
             <a:endParaRPr lang="en-US"/>
           </a:p>
